--- a/slides/khmer_sign_language_presentation.pptx
+++ b/slides/khmer_sign_language_presentation.pptx
@@ -10493,7 +10493,7 @@
         </p:nvSpPr>
         <p:spPr>
           <a:xfrm>
-            <a:off x="7040880" y="2240280"/>
+            <a:off x="7040880" y="2148840"/>
             <a:ext cx="4572000" cy="320040"/>
           </a:xfrm>
           <a:prstGeom prst="rect">
@@ -10535,8 +10535,8 @@
         </p:nvSpPr>
         <p:spPr>
           <a:xfrm>
-            <a:off x="7040880" y="2743200"/>
-            <a:ext cx="4572000" cy="1645920"/>
+            <a:off x="7040880" y="2606040"/>
+            <a:ext cx="4572000" cy="1371600"/>
           </a:xfrm>
           <a:prstGeom prst="rect">
             <a:avLst/>
@@ -10554,18 +10554,18 @@
                 <a:spcPct val="108000"/>
               </a:lnSpc>
               <a:spcAft>
-                <a:spcPts val="1000"/>
+                <a:spcPts val="600"/>
               </a:spcAft>
               <a:buChar char="•"/>
             </a:pPr>
             <a:r>
-              <a:rPr sz="1600" b="0">
+              <a:rPr sz="1500" b="0">
                 <a:solidFill>
                   <a:srgbClr val="111111"/>
                 </a:solidFill>
                 <a:latin typeface="Arial"/>
               </a:rPr>
-              <a:t>Reads a short webcam clip of a Khmer sign</a:t>
+              <a:t>Input: a webcam clip, 90 frames × 258 landmark values (about 3 s)</a:t>
             </a:r>
           </a:p>
           <a:p>
@@ -10574,38 +10574,18 @@
                 <a:spcPct val="108000"/>
               </a:lnSpc>
               <a:spcAft>
-                <a:spcPts val="1000"/>
+                <a:spcPts val="600"/>
               </a:spcAft>
               <a:buChar char="•"/>
             </a:pPr>
             <a:r>
-              <a:rPr sz="1600" b="0">
+              <a:rPr sz="1500" b="0">
                 <a:solidFill>
                   <a:srgbClr val="111111"/>
                 </a:solidFill>
                 <a:latin typeface="Arial"/>
               </a:rPr>
-              <a:t>Input: 90 frames × 258 landmark values (about 3 s)</a:t>
-            </a:r>
-          </a:p>
-          <a:p>
-            <a:pPr algn="l" marL="274320" indent="-274320">
-              <a:lnSpc>
-                <a:spcPct val="108000"/>
-              </a:lnSpc>
-              <a:spcAft>
-                <a:spcPts val="1000"/>
-              </a:spcAft>
-              <a:buChar char="•"/>
-            </a:pPr>
-            <a:r>
-              <a:rPr sz="1600" b="0">
-                <a:solidFill>
-                  <a:srgbClr val="111111"/>
-                </a:solidFill>
-                <a:latin typeface="Arial"/>
-              </a:rPr>
-              <a:t>Output: one of 11 words</a:t>
+              <a:t>Output: one of 11 words (multi-class sequence classification)</a:t>
             </a:r>
           </a:p>
         </p:txBody>
@@ -10618,7 +10598,7 @@
         </p:nvSpPr>
         <p:spPr>
           <a:xfrm>
-            <a:off x="7040880" y="4526280"/>
+            <a:off x="7040880" y="3794760"/>
             <a:ext cx="4572000" cy="320040"/>
           </a:xfrm>
           <a:prstGeom prst="rect">
@@ -10647,7 +10627,7 @@
                 </a:solidFill>
                 <a:latin typeface="Arial"/>
               </a:rPr>
-              <a:t>The question</a:t>
+              <a:t>Why it matters</a:t>
             </a:r>
           </a:p>
         </p:txBody>
@@ -10660,8 +10640,8 @@
         </p:nvSpPr>
         <p:spPr>
           <a:xfrm>
-            <a:off x="7040880" y="5029200"/>
-            <a:ext cx="4572000" cy="1188720"/>
+            <a:off x="7040880" y="4251960"/>
+            <a:ext cx="4572000" cy="822960"/>
           </a:xfrm>
           <a:prstGeom prst="rect">
             <a:avLst/>
@@ -10679,12 +10659,97 @@
                 <a:spcPct val="108000"/>
               </a:lnSpc>
               <a:spcAft>
-                <a:spcPts val="1000"/>
+                <a:spcPts val="600"/>
               </a:spcAft>
               <a:buChar char="•"/>
             </a:pPr>
             <a:r>
-              <a:rPr sz="1600" b="0">
+              <a:rPr sz="1500" b="0">
+                <a:solidFill>
+                  <a:srgbClr val="111111"/>
+                </a:solidFill>
+                <a:latin typeface="Arial"/>
+              </a:rPr>
+              <a:t>Khmer Sign Language has very little data or software; a webcam-only recogniser is a first step</a:t>
+            </a:r>
+          </a:p>
+        </p:txBody>
+      </p:sp>
+      <p:sp>
+        <p:nvSpPr>
+          <p:cNvPr id="14" name="TextBox 13"/>
+          <p:cNvSpPr txBox="1"/>
+          <p:nvPr/>
+        </p:nvSpPr>
+        <p:spPr>
+          <a:xfrm>
+            <a:off x="7040880" y="5074920"/>
+            <a:ext cx="4572000" cy="320040"/>
+          </a:xfrm>
+          <a:prstGeom prst="rect">
+            <a:avLst/>
+          </a:prstGeom>
+          <a:noFill/>
+        </p:spPr>
+        <p:txBody>
+          <a:bodyPr wrap="square" anchor="t" lIns="0" rIns="0" tIns="0" bIns="0">
+            <a:spAutoFit/>
+          </a:bodyPr>
+          <a:lstStyle/>
+          <a:p>
+            <a:pPr algn="l">
+              <a:lnSpc>
+                <a:spcPct val="108000"/>
+              </a:lnSpc>
+              <a:spcAft>
+                <a:spcPts val="0"/>
+              </a:spcAft>
+            </a:pPr>
+            <a:r>
+              <a:rPr sz="1600" b="1">
+                <a:solidFill>
+                  <a:srgbClr val="111111"/>
+                </a:solidFill>
+                <a:latin typeface="Arial"/>
+              </a:rPr>
+              <a:t>The question</a:t>
+            </a:r>
+          </a:p>
+        </p:txBody>
+      </p:sp>
+      <p:sp>
+        <p:nvSpPr>
+          <p:cNvPr id="15" name="TextBox 14"/>
+          <p:cNvSpPr txBox="1"/>
+          <p:nvPr/>
+        </p:nvSpPr>
+        <p:spPr>
+          <a:xfrm>
+            <a:off x="7040880" y="5532120"/>
+            <a:ext cx="4572000" cy="731520"/>
+          </a:xfrm>
+          <a:prstGeom prst="rect">
+            <a:avLst/>
+          </a:prstGeom>
+          <a:noFill/>
+        </p:spPr>
+        <p:txBody>
+          <a:bodyPr wrap="square" anchor="t" lIns="0" rIns="0" tIns="0" bIns="0">
+            <a:spAutoFit/>
+          </a:bodyPr>
+          <a:lstStyle/>
+          <a:p>
+            <a:pPr algn="l" marL="274320" indent="-274320">
+              <a:lnSpc>
+                <a:spcPct val="108000"/>
+              </a:lnSpc>
+              <a:spcAft>
+                <a:spcPts val="600"/>
+              </a:spcAft>
+              <a:buChar char="•"/>
+            </a:pPr>
+            <a:r>
+              <a:rPr sz="1500" b="0">
                 <a:solidFill>
                   <a:srgbClr val="111111"/>
                 </a:solidFill>
@@ -11346,18 +11411,18 @@
                 <a:spcPct val="108000"/>
               </a:lnSpc>
               <a:spcAft>
-                <a:spcPts val="1000"/>
+                <a:spcPts val="800"/>
               </a:spcAft>
               <a:buChar char="•"/>
             </a:pPr>
             <a:r>
-              <a:rPr sz="1600" b="0">
+              <a:rPr sz="1500" b="0">
                 <a:solidFill>
                   <a:srgbClr val="111111"/>
                 </a:solidFill>
                 <a:latin typeface="Arial"/>
               </a:rPr>
-              <a:t>One signer, one webcam</a:t>
+              <a:t>One signer, one webcam; balanced classes</a:t>
             </a:r>
           </a:p>
           <a:p>
@@ -11366,18 +11431,18 @@
                 <a:spcPct val="108000"/>
               </a:lnSpc>
               <a:spcAft>
-                <a:spcPts val="1000"/>
+                <a:spcPts val="800"/>
               </a:spcAft>
               <a:buChar char="•"/>
             </a:pPr>
             <a:r>
-              <a:rPr sz="1600" b="0">
+              <a:rPr sz="1500" b="0">
                 <a:solidFill>
                   <a:srgbClr val="111111"/>
                 </a:solidFill>
                 <a:latin typeface="Arial"/>
               </a:rPr>
-              <a:t>Fixed, stratified split (seed 42)</a:t>
+              <a:t>Fixed, stratified split (seed 42), same for every model</a:t>
             </a:r>
           </a:p>
           <a:p>
@@ -11386,12 +11451,32 @@
                 <a:spcPct val="108000"/>
               </a:lnSpc>
               <a:spcAft>
-                <a:spcPts val="1000"/>
+                <a:spcPts val="800"/>
               </a:spcAft>
               <a:buChar char="•"/>
             </a:pPr>
             <a:r>
-              <a:rPr sz="1600" b="0">
+              <a:rPr sz="1500" b="0">
+                <a:solidFill>
+                  <a:srgbClr val="111111"/>
+                </a:solidFill>
+                <a:latin typeface="Arial"/>
+              </a:rPr>
+              <a:t>Preprocessing: MediaPipe landmarks only; no augmentation</a:t>
+            </a:r>
+          </a:p>
+          <a:p>
+            <a:pPr algn="l" marL="274320" indent="-274320">
+              <a:lnSpc>
+                <a:spcPct val="108000"/>
+              </a:lnSpc>
+              <a:spcAft>
+                <a:spcPts val="800"/>
+              </a:spcAft>
+              <a:buChar char="•"/>
+            </a:pPr>
+            <a:r>
+              <a:rPr sz="1500" b="0">
                 <a:solidFill>
                   <a:srgbClr val="111111"/>
                 </a:solidFill>
@@ -11740,7 +11825,7 @@
         </p:nvSpPr>
         <p:spPr>
           <a:xfrm>
-            <a:off x="8503920" y="2240280"/>
+            <a:off x="8503920" y="2103120"/>
             <a:ext cx="3200400" cy="365760"/>
           </a:xfrm>
           <a:prstGeom prst="rect">
@@ -11782,7 +11867,7 @@
         </p:nvSpPr>
         <p:spPr>
           <a:xfrm>
-            <a:off x="8503920" y="2651760"/>
+            <a:off x="8503920" y="2514600"/>
             <a:ext cx="3200400" cy="365760"/>
           </a:xfrm>
           <a:prstGeom prst="rect">
@@ -11824,7 +11909,7 @@
         </p:nvSpPr>
         <p:spPr>
           <a:xfrm>
-            <a:off x="8503920" y="3246120"/>
+            <a:off x="8503920" y="2971800"/>
             <a:ext cx="3200400" cy="365760"/>
           </a:xfrm>
           <a:prstGeom prst="rect">
@@ -11866,7 +11951,7 @@
         </p:nvSpPr>
         <p:spPr>
           <a:xfrm>
-            <a:off x="8503920" y="3657600"/>
+            <a:off x="8503920" y="3383280"/>
             <a:ext cx="3200400" cy="365760"/>
           </a:xfrm>
           <a:prstGeom prst="rect">
@@ -11908,7 +11993,7 @@
         </p:nvSpPr>
         <p:spPr>
           <a:xfrm>
-            <a:off x="8503920" y="4251960"/>
+            <a:off x="8503920" y="3840480"/>
             <a:ext cx="3200400" cy="365760"/>
           </a:xfrm>
           <a:prstGeom prst="rect">
@@ -11950,7 +12035,7 @@
         </p:nvSpPr>
         <p:spPr>
           <a:xfrm>
-            <a:off x="8503920" y="4663440"/>
+            <a:off x="8503920" y="4251960"/>
             <a:ext cx="3200400" cy="365760"/>
           </a:xfrm>
           <a:prstGeom prst="rect">
@@ -11992,8 +12077,8 @@
         </p:nvSpPr>
         <p:spPr>
           <a:xfrm>
-            <a:off x="8503920" y="5349240"/>
-            <a:ext cx="3200400" cy="457200"/>
+            <a:off x="8503920" y="4800600"/>
+            <a:ext cx="3200400" cy="365760"/>
           </a:xfrm>
           <a:prstGeom prst="rect">
             <a:avLst/>
@@ -12021,7 +12106,49 @@
                 </a:solidFill>
                 <a:latin typeface="Arial"/>
               </a:rPr>
-              <a:t>All trained from scratch</a:t>
+              <a:t>Why these three</a:t>
+            </a:r>
+          </a:p>
+        </p:txBody>
+      </p:sp>
+      <p:sp>
+        <p:nvSpPr>
+          <p:cNvPr id="17" name="TextBox 16"/>
+          <p:cNvSpPr txBox="1"/>
+          <p:nvPr/>
+        </p:nvSpPr>
+        <p:spPr>
+          <a:xfrm>
+            <a:off x="8503920" y="5166360"/>
+            <a:ext cx="3200400" cy="822960"/>
+          </a:xfrm>
+          <a:prstGeom prst="rect">
+            <a:avLst/>
+          </a:prstGeom>
+          <a:noFill/>
+        </p:spPr>
+        <p:txBody>
+          <a:bodyPr wrap="square" anchor="t" lIns="0" rIns="0" tIns="0" bIns="0">
+            <a:spAutoFit/>
+          </a:bodyPr>
+          <a:lstStyle/>
+          <a:p>
+            <a:pPr algn="l">
+              <a:lnSpc>
+                <a:spcPct val="108000"/>
+              </a:lnSpc>
+              <a:spcAft>
+                <a:spcPts val="0"/>
+              </a:spcAft>
+            </a:pPr>
+            <a:r>
+              <a:rPr sz="1400" b="0">
+                <a:solidFill>
+                  <a:srgbClr val="555555"/>
+                </a:solidFill>
+                <a:latin typeface="Arial"/>
+              </a:rPr>
+              <a:t>Sequence models from Sessions 07–08, all trained from scratch; only the architecture changes</a:t>
             </a:r>
           </a:p>
         </p:txBody>
@@ -13050,268 +13177,16 @@
           </a:p>
         </p:txBody>
       </p:sp>
-      <p:sp>
-        <p:nvSpPr>
-          <p:cNvPr id="9" name="TextBox 8"/>
-          <p:cNvSpPr txBox="1"/>
-          <p:nvPr/>
-        </p:nvSpPr>
-        <p:spPr>
-          <a:xfrm>
-            <a:off x="786384" y="2103120"/>
-            <a:ext cx="3456432" cy="548640"/>
-          </a:xfrm>
-          <a:prstGeom prst="rect">
-            <a:avLst/>
-          </a:prstGeom>
-          <a:noFill/>
-        </p:spPr>
-        <p:txBody>
-          <a:bodyPr wrap="square" anchor="t" lIns="0" rIns="0" tIns="0" bIns="0">
-            <a:spAutoFit/>
-          </a:bodyPr>
-          <a:lstStyle/>
-          <a:p>
-            <a:pPr algn="ctr">
-              <a:lnSpc>
-                <a:spcPct val="108000"/>
-              </a:lnSpc>
-              <a:spcAft>
-                <a:spcPts val="0"/>
-              </a:spcAft>
-            </a:pPr>
-            <a:r>
-              <a:rPr sz="3000" b="1">
-                <a:solidFill>
-                  <a:srgbClr val="111111"/>
-                </a:solidFill>
-                <a:latin typeface="Arial"/>
-              </a:rPr>
-              <a:t>100%</a:t>
-            </a:r>
-          </a:p>
-        </p:txBody>
-      </p:sp>
-      <p:sp>
-        <p:nvSpPr>
-          <p:cNvPr id="10" name="TextBox 9"/>
-          <p:cNvSpPr txBox="1"/>
-          <p:nvPr/>
-        </p:nvSpPr>
-        <p:spPr>
-          <a:xfrm>
-            <a:off x="786384" y="2697479"/>
-            <a:ext cx="3456432" cy="365760"/>
-          </a:xfrm>
-          <a:prstGeom prst="rect">
-            <a:avLst/>
-          </a:prstGeom>
-          <a:noFill/>
-        </p:spPr>
-        <p:txBody>
-          <a:bodyPr wrap="square" anchor="t" lIns="0" rIns="0" tIns="0" bIns="0">
-            <a:spAutoFit/>
-          </a:bodyPr>
-          <a:lstStyle/>
-          <a:p>
-            <a:pPr algn="ctr">
-              <a:lnSpc>
-                <a:spcPct val="108000"/>
-              </a:lnSpc>
-              <a:spcAft>
-                <a:spcPts val="0"/>
-              </a:spcAft>
-            </a:pPr>
-            <a:r>
-              <a:rPr sz="1300" b="0">
-                <a:solidFill>
-                  <a:srgbClr val="555555"/>
-                </a:solidFill>
-                <a:latin typeface="Arial"/>
-              </a:rPr>
-              <a:t>GRU test accuracy</a:t>
-            </a:r>
-          </a:p>
-        </p:txBody>
-      </p:sp>
-      <p:sp>
-        <p:nvSpPr>
-          <p:cNvPr id="11" name="TextBox 10"/>
-          <p:cNvSpPr txBox="1"/>
-          <p:nvPr/>
-        </p:nvSpPr>
-        <p:spPr>
-          <a:xfrm>
-            <a:off x="4425696" y="2103120"/>
-            <a:ext cx="3456432" cy="548640"/>
-          </a:xfrm>
-          <a:prstGeom prst="rect">
-            <a:avLst/>
-          </a:prstGeom>
-          <a:noFill/>
-        </p:spPr>
-        <p:txBody>
-          <a:bodyPr wrap="square" anchor="t" lIns="0" rIns="0" tIns="0" bIns="0">
-            <a:spAutoFit/>
-          </a:bodyPr>
-          <a:lstStyle/>
-          <a:p>
-            <a:pPr algn="ctr">
-              <a:lnSpc>
-                <a:spcPct val="108000"/>
-              </a:lnSpc>
-              <a:spcAft>
-                <a:spcPts val="0"/>
-              </a:spcAft>
-            </a:pPr>
-            <a:r>
-              <a:rPr sz="3000" b="1">
-                <a:solidFill>
-                  <a:srgbClr val="111111"/>
-                </a:solidFill>
-                <a:latin typeface="Arial"/>
-              </a:rPr>
-              <a:t>98%</a:t>
-            </a:r>
-          </a:p>
-        </p:txBody>
-      </p:sp>
-      <p:sp>
-        <p:nvSpPr>
-          <p:cNvPr id="12" name="TextBox 11"/>
-          <p:cNvSpPr txBox="1"/>
-          <p:nvPr/>
-        </p:nvSpPr>
-        <p:spPr>
-          <a:xfrm>
-            <a:off x="4425696" y="2697479"/>
-            <a:ext cx="3456432" cy="365760"/>
-          </a:xfrm>
-          <a:prstGeom prst="rect">
-            <a:avLst/>
-          </a:prstGeom>
-          <a:noFill/>
-        </p:spPr>
-        <p:txBody>
-          <a:bodyPr wrap="square" anchor="t" lIns="0" rIns="0" tIns="0" bIns="0">
-            <a:spAutoFit/>
-          </a:bodyPr>
-          <a:lstStyle/>
-          <a:p>
-            <a:pPr algn="ctr">
-              <a:lnSpc>
-                <a:spcPct val="108000"/>
-              </a:lnSpc>
-              <a:spcAft>
-                <a:spcPts val="0"/>
-              </a:spcAft>
-            </a:pPr>
-            <a:r>
-              <a:rPr sz="1300" b="0">
-                <a:solidFill>
-                  <a:srgbClr val="555555"/>
-                </a:solidFill>
-                <a:latin typeface="Arial"/>
-              </a:rPr>
-              <a:t>Transformer test accuracy</a:t>
-            </a:r>
-          </a:p>
-        </p:txBody>
-      </p:sp>
-      <p:sp>
-        <p:nvSpPr>
-          <p:cNvPr id="13" name="TextBox 12"/>
-          <p:cNvSpPr txBox="1"/>
-          <p:nvPr/>
-        </p:nvSpPr>
-        <p:spPr>
-          <a:xfrm>
-            <a:off x="8065007" y="2103120"/>
-            <a:ext cx="3456432" cy="548640"/>
-          </a:xfrm>
-          <a:prstGeom prst="rect">
-            <a:avLst/>
-          </a:prstGeom>
-          <a:noFill/>
-        </p:spPr>
-        <p:txBody>
-          <a:bodyPr wrap="square" anchor="t" lIns="0" rIns="0" tIns="0" bIns="0">
-            <a:spAutoFit/>
-          </a:bodyPr>
-          <a:lstStyle/>
-          <a:p>
-            <a:pPr algn="ctr">
-              <a:lnSpc>
-                <a:spcPct val="108000"/>
-              </a:lnSpc>
-              <a:spcAft>
-                <a:spcPts val="0"/>
-              </a:spcAft>
-            </a:pPr>
-            <a:r>
-              <a:rPr sz="3000" b="1">
-                <a:solidFill>
-                  <a:srgbClr val="111111"/>
-                </a:solidFill>
-                <a:latin typeface="Arial"/>
-              </a:rPr>
-              <a:t>38%</a:t>
-            </a:r>
-          </a:p>
-        </p:txBody>
-      </p:sp>
-      <p:sp>
-        <p:nvSpPr>
-          <p:cNvPr id="14" name="TextBox 13"/>
-          <p:cNvSpPr txBox="1"/>
-          <p:nvPr/>
-        </p:nvSpPr>
-        <p:spPr>
-          <a:xfrm>
-            <a:off x="8065007" y="2697479"/>
-            <a:ext cx="3456432" cy="365760"/>
-          </a:xfrm>
-          <a:prstGeom prst="rect">
-            <a:avLst/>
-          </a:prstGeom>
-          <a:noFill/>
-        </p:spPr>
-        <p:txBody>
-          <a:bodyPr wrap="square" anchor="t" lIns="0" rIns="0" tIns="0" bIns="0">
-            <a:spAutoFit/>
-          </a:bodyPr>
-          <a:lstStyle/>
-          <a:p>
-            <a:pPr algn="ctr">
-              <a:lnSpc>
-                <a:spcPct val="108000"/>
-              </a:lnSpc>
-              <a:spcAft>
-                <a:spcPts val="0"/>
-              </a:spcAft>
-            </a:pPr>
-            <a:r>
-              <a:rPr sz="1300" b="0">
-                <a:solidFill>
-                  <a:srgbClr val="555555"/>
-                </a:solidFill>
-                <a:latin typeface="Arial"/>
-              </a:rPr>
-              <a:t>LSTM test accuracy</a:t>
-            </a:r>
-          </a:p>
-        </p:txBody>
-      </p:sp>
       <p:graphicFrame>
         <p:nvGraphicFramePr>
-          <p:cNvPr id="15" name="Table 14"/>
+          <p:cNvPr id="9" name="Table 8"/>
           <p:cNvGraphicFramePr>
             <a:graphicFrameLocks noGrp="1"/>
           </p:cNvGraphicFramePr>
           <p:nvPr/>
         </p:nvGraphicFramePr>
         <p:xfrm>
-          <a:off x="822960" y="3337560"/>
+          <a:off x="822960" y="2240280"/>
           <a:ext cx="7040880" cy="1828800"/>
         </p:xfrm>
         <a:graphic>
@@ -13799,58 +13674,40 @@
           </a:graphicData>
         </a:graphic>
       </p:graphicFrame>
-      <p:sp>
-        <p:nvSpPr>
-          <p:cNvPr id="16" name="TextBox 15"/>
+      <p:pic>
+        <p:nvPicPr>
+          <p:cNvPr id="10" name="Picture 9" descr="fig_accuracy_bars.png"/>
+          <p:cNvPicPr>
+            <a:picLocks noChangeAspect="1"/>
+          </p:cNvPicPr>
+          <p:nvPr/>
+        </p:nvPicPr>
+        <p:blipFill>
+          <a:blip r:embed="rId3"/>
+          <a:stretch>
+            <a:fillRect/>
+          </a:stretch>
+        </p:blipFill>
+        <p:spPr>
+          <a:xfrm>
+            <a:off x="8138160" y="2700556"/>
+            <a:ext cx="3566160" cy="2919927"/>
+          </a:xfrm>
+          <a:prstGeom prst="rect">
+            <a:avLst/>
+          </a:prstGeom>
+        </p:spPr>
+      </p:pic>
+      <p:sp>
+        <p:nvSpPr>
+          <p:cNvPr id="11" name="TextBox 10"/>
           <p:cNvSpPr txBox="1"/>
           <p:nvPr/>
         </p:nvSpPr>
         <p:spPr>
           <a:xfrm>
-            <a:off x="8321040" y="3337560"/>
-            <a:ext cx="3291840" cy="320040"/>
-          </a:xfrm>
-          <a:prstGeom prst="rect">
-            <a:avLst/>
-          </a:prstGeom>
-          <a:noFill/>
-        </p:spPr>
-        <p:txBody>
-          <a:bodyPr wrap="square" anchor="t" lIns="0" rIns="0" tIns="0" bIns="0">
-            <a:spAutoFit/>
-          </a:bodyPr>
-          <a:lstStyle/>
-          <a:p>
-            <a:pPr algn="l">
-              <a:lnSpc>
-                <a:spcPct val="108000"/>
-              </a:lnSpc>
-              <a:spcAft>
-                <a:spcPts val="0"/>
-              </a:spcAft>
-            </a:pPr>
-            <a:r>
-              <a:rPr sz="1600" b="1">
-                <a:solidFill>
-                  <a:srgbClr val="111111"/>
-                </a:solidFill>
-                <a:latin typeface="Arial"/>
-              </a:rPr>
-              <a:t>Reading the table</a:t>
-            </a:r>
-          </a:p>
-        </p:txBody>
-      </p:sp>
-      <p:sp>
-        <p:nvSpPr>
-          <p:cNvPr id="17" name="TextBox 16"/>
-          <p:cNvSpPr txBox="1"/>
-          <p:nvPr/>
-        </p:nvSpPr>
-        <p:spPr>
-          <a:xfrm>
-            <a:off x="8321040" y="3794760"/>
-            <a:ext cx="3291840" cy="2468880"/>
+            <a:off x="822960" y="4389120"/>
+            <a:ext cx="6949440" cy="1828800"/>
           </a:xfrm>
           <a:prstGeom prst="rect">
             <a:avLst/>
